--- a/presentation-5q.pptx
+++ b/presentation-5q.pptx
@@ -307,7 +307,7 @@
           <a:p>
             <a:fld id="{5BCAD085-E8A6-8845-BD4E-CB4CCA059FC4}" type="datetimeFigureOut">
               <a:rPr lang="en-US" smtClean="0"/>
-              <a:t>8/17/2026</a:t>
+              <a:t>8/18/2026</a:t>
             </a:fld>
             <a:endParaRPr lang="en-US"/>
           </a:p>
@@ -475,7 +475,7 @@
           <a:p>
             <a:fld id="{5BCAD085-E8A6-8845-BD4E-CB4CCA059FC4}" type="datetimeFigureOut">
               <a:rPr lang="en-US" smtClean="0"/>
-              <a:t>8/17/2026</a:t>
+              <a:t>8/18/2026</a:t>
             </a:fld>
             <a:endParaRPr lang="en-US"/>
           </a:p>
@@ -653,7 +653,7 @@
           <a:p>
             <a:fld id="{5BCAD085-E8A6-8845-BD4E-CB4CCA059FC4}" type="datetimeFigureOut">
               <a:rPr lang="en-US" smtClean="0"/>
-              <a:t>8/17/2026</a:t>
+              <a:t>8/18/2026</a:t>
             </a:fld>
             <a:endParaRPr lang="en-US"/>
           </a:p>
@@ -821,7 +821,7 @@
           <a:p>
             <a:fld id="{5BCAD085-E8A6-8845-BD4E-CB4CCA059FC4}" type="datetimeFigureOut">
               <a:rPr lang="en-US" smtClean="0"/>
-              <a:t>8/17/2026</a:t>
+              <a:t>8/18/2026</a:t>
             </a:fld>
             <a:endParaRPr lang="en-US"/>
           </a:p>
@@ -1066,7 +1066,7 @@
           <a:p>
             <a:fld id="{5BCAD085-E8A6-8845-BD4E-CB4CCA059FC4}" type="datetimeFigureOut">
               <a:rPr lang="en-US" smtClean="0"/>
-              <a:t>8/17/2026</a:t>
+              <a:t>8/18/2026</a:t>
             </a:fld>
             <a:endParaRPr lang="en-US"/>
           </a:p>
@@ -1351,7 +1351,7 @@
           <a:p>
             <a:fld id="{5BCAD085-E8A6-8845-BD4E-CB4CCA059FC4}" type="datetimeFigureOut">
               <a:rPr lang="en-US" smtClean="0"/>
-              <a:t>8/17/2026</a:t>
+              <a:t>8/18/2026</a:t>
             </a:fld>
             <a:endParaRPr lang="en-US"/>
           </a:p>
@@ -1770,7 +1770,7 @@
           <a:p>
             <a:fld id="{5BCAD085-E8A6-8845-BD4E-CB4CCA059FC4}" type="datetimeFigureOut">
               <a:rPr lang="en-US" smtClean="0"/>
-              <a:t>8/17/2026</a:t>
+              <a:t>8/18/2026</a:t>
             </a:fld>
             <a:endParaRPr lang="en-US"/>
           </a:p>
@@ -1887,7 +1887,7 @@
           <a:p>
             <a:fld id="{5BCAD085-E8A6-8845-BD4E-CB4CCA059FC4}" type="datetimeFigureOut">
               <a:rPr lang="en-US" smtClean="0"/>
-              <a:t>8/17/2026</a:t>
+              <a:t>8/18/2026</a:t>
             </a:fld>
             <a:endParaRPr lang="en-US"/>
           </a:p>
@@ -1982,7 +1982,7 @@
           <a:p>
             <a:fld id="{5BCAD085-E8A6-8845-BD4E-CB4CCA059FC4}" type="datetimeFigureOut">
               <a:rPr lang="en-US" smtClean="0"/>
-              <a:t>8/17/2026</a:t>
+              <a:t>8/18/2026</a:t>
             </a:fld>
             <a:endParaRPr lang="en-US"/>
           </a:p>
@@ -2257,7 +2257,7 @@
           <a:p>
             <a:fld id="{5BCAD085-E8A6-8845-BD4E-CB4CCA059FC4}" type="datetimeFigureOut">
               <a:rPr lang="en-US" smtClean="0"/>
-              <a:t>8/17/2026</a:t>
+              <a:t>8/18/2026</a:t>
             </a:fld>
             <a:endParaRPr lang="en-US"/>
           </a:p>
@@ -2509,7 +2509,7 @@
           <a:p>
             <a:fld id="{5BCAD085-E8A6-8845-BD4E-CB4CCA059FC4}" type="datetimeFigureOut">
               <a:rPr lang="en-US" smtClean="0"/>
-              <a:t>8/17/2026</a:t>
+              <a:t>8/18/2026</a:t>
             </a:fld>
             <a:endParaRPr lang="en-US"/>
           </a:p>
@@ -2720,7 +2720,7 @@
           <a:p>
             <a:fld id="{5BCAD085-E8A6-8845-BD4E-CB4CCA059FC4}" type="datetimeFigureOut">
               <a:rPr lang="en-US" smtClean="0"/>
-              <a:t>8/17/2026</a:t>
+              <a:t>8/18/2026</a:t>
             </a:fld>
             <a:endParaRPr lang="en-US"/>
           </a:p>
@@ -3261,7 +3261,7 @@
           <a:lstStyle/>
           <a:p>
             <a:r>
-              <a:rPr sz="1800" b="1">
+              <a:rPr sz="1800" b="1" dirty="0" err="1">
                 <a:solidFill>
                   <a:srgbClr val="232323"/>
                 </a:solidFill>
@@ -3269,6 +3269,12 @@
               </a:rPr>
               <a:t>题目与数据</a:t>
             </a:r>
+            <a:endParaRPr sz="1800" b="1" dirty="0">
+              <a:solidFill>
+                <a:srgbClr val="232323"/>
+              </a:solidFill>
+              <a:latin typeface="Arial"/>
+            </a:endParaRPr>
           </a:p>
           <a:p>
             <a:pPr>
@@ -3277,7 +3283,7 @@
               </a:spcAft>
             </a:pPr>
             <a:r>
-              <a:rPr sz="1400">
+              <a:rPr sz="1400" dirty="0" err="1">
                 <a:solidFill>
                   <a:srgbClr val="232323"/>
                 </a:solidFill>
@@ -3285,6 +3291,12 @@
               </a:rPr>
               <a:t>使用者：准备历史展览、想解释模型局限的博物馆教育团队</a:t>
             </a:r>
+            <a:endParaRPr sz="1400" dirty="0">
+              <a:solidFill>
+                <a:srgbClr val="232323"/>
+              </a:solidFill>
+              <a:latin typeface="Microsoft YaHei"/>
+            </a:endParaRPr>
           </a:p>
           <a:p>
             <a:pPr>
@@ -3293,13 +3305,22 @@
               </a:spcAft>
             </a:pPr>
             <a:r>
-              <a:rPr sz="1400">
-                <a:solidFill>
-                  <a:srgbClr val="232323"/>
-                </a:solidFill>
-                <a:latin typeface="Microsoft YaHei"/>
-              </a:rPr>
-              <a:t>真实输入：Kaggle Titanic train.csv，891 行、12 列</a:t>
+              <a:rPr sz="1400" dirty="0" err="1">
+                <a:solidFill>
+                  <a:srgbClr val="232323"/>
+                </a:solidFill>
+                <a:latin typeface="Microsoft YaHei"/>
+              </a:rPr>
+              <a:t>真实输入：Kaggle</a:t>
+            </a:r>
+            <a:r>
+              <a:rPr sz="1400" dirty="0">
+                <a:solidFill>
+                  <a:srgbClr val="232323"/>
+                </a:solidFill>
+                <a:latin typeface="Microsoft YaHei"/>
+              </a:rPr>
+              <a:t> Titanic train.csv，891 行、12 列</a:t>
             </a:r>
           </a:p>
           <a:p>
@@ -3309,7 +3330,7 @@
               </a:spcAft>
             </a:pPr>
             <a:r>
-              <a:rPr sz="1400">
+              <a:rPr sz="1400" dirty="0" err="1">
                 <a:solidFill>
                   <a:srgbClr val="232323"/>
                 </a:solidFill>
@@ -3317,6 +3338,12 @@
               </a:rPr>
               <a:t>核心目标：比较多数类基线与随机森林候选模型</a:t>
             </a:r>
+            <a:endParaRPr sz="1400" dirty="0">
+              <a:solidFill>
+                <a:srgbClr val="232323"/>
+              </a:solidFill>
+              <a:latin typeface="Microsoft YaHei"/>
+            </a:endParaRPr>
           </a:p>
           <a:p>
             <a:pPr>
@@ -3325,7 +3352,7 @@
               </a:spcAft>
             </a:pPr>
             <a:r>
-              <a:rPr sz="1400">
+              <a:rPr sz="1400" dirty="0" err="1">
                 <a:solidFill>
                   <a:srgbClr val="232323"/>
                 </a:solidFill>
@@ -3333,6 +3360,12 @@
               </a:rPr>
               <a:t>边界：这是历史观察数据分析，不是现代救援决策，也不能证明因果</a:t>
             </a:r>
+            <a:endParaRPr sz="1400" dirty="0">
+              <a:solidFill>
+                <a:srgbClr val="232323"/>
+              </a:solidFill>
+              <a:latin typeface="Microsoft YaHei"/>
+            </a:endParaRPr>
           </a:p>
           <a:p>
             <a:pPr>
@@ -3341,7 +3374,7 @@
               </a:spcAft>
             </a:pPr>
             <a:r>
-              <a:rPr sz="1400">
+              <a:rPr sz="1400" dirty="0" err="1">
                 <a:solidFill>
                   <a:srgbClr val="232323"/>
                 </a:solidFill>
@@ -3349,6 +3382,12 @@
               </a:rPr>
               <a:t>这次结果里，候选模型比基线更好，但仍然会错</a:t>
             </a:r>
+            <a:endParaRPr sz="1400" dirty="0">
+              <a:solidFill>
+                <a:srgbClr val="232323"/>
+              </a:solidFill>
+              <a:latin typeface="Microsoft YaHei"/>
+            </a:endParaRPr>
           </a:p>
         </p:txBody>
       </p:sp>
@@ -3647,7 +3686,7 @@
         <p:spPr>
           <a:xfrm>
             <a:off x="502920" y="274320"/>
-            <a:ext cx="11155680" cy="822960"/>
+            <a:ext cx="5817683" cy="707886"/>
           </a:xfrm>
           <a:prstGeom prst="rect">
             <a:avLst/>
@@ -3661,25 +3700,100 @@
           <a:lstStyle/>
           <a:p>
             <a:r>
-              <a:rPr sz="2800" b="1">
+              <a:rPr sz="2800" b="1" dirty="0">
                 <a:solidFill>
                   <a:srgbClr val="232323"/>
                 </a:solidFill>
                 <a:latin typeface="Arial"/>
               </a:rPr>
-              <a:t>1. 从真实乘客输入追踪到预测输出</a:t>
-            </a:r>
-          </a:p>
-          <a:p>
-            <a:r>
-              <a:rPr sz="1200">
+              <a:t>1. </a:t>
+            </a:r>
+            <a:r>
+              <a:rPr sz="2800" b="1" dirty="0" err="1">
+                <a:solidFill>
+                  <a:srgbClr val="232323"/>
+                </a:solidFill>
+                <a:latin typeface="Arial"/>
+              </a:rPr>
+              <a:t>从真实乘客输入追踪到预测输出</a:t>
+            </a:r>
+            <a:endParaRPr sz="2800" b="1" dirty="0">
+              <a:solidFill>
+                <a:srgbClr val="232323"/>
+              </a:solidFill>
+              <a:latin typeface="Arial"/>
+            </a:endParaRPr>
+          </a:p>
+          <a:p>
+            <a:r>
+              <a:rPr sz="1200" dirty="0" err="1">
                 <a:solidFill>
                   <a:srgbClr val="5A5A5A"/>
                 </a:solidFill>
                 <a:latin typeface="Microsoft YaHei"/>
               </a:rPr>
-              <a:t>示例样本来自 errors.csv：PassengerId 502, Canavan, Miss. Mary</a:t>
-            </a:r>
+              <a:t>示例样本来自</a:t>
+            </a:r>
+            <a:r>
+              <a:rPr sz="1200" dirty="0">
+                <a:solidFill>
+                  <a:srgbClr val="5A5A5A"/>
+                </a:solidFill>
+                <a:latin typeface="Microsoft YaHei"/>
+              </a:rPr>
+              <a:t> </a:t>
+            </a:r>
+            <a:r>
+              <a:rPr sz="1200" dirty="0" err="1">
+                <a:solidFill>
+                  <a:srgbClr val="5A5A5A"/>
+                </a:solidFill>
+                <a:latin typeface="Microsoft YaHei"/>
+              </a:rPr>
+              <a:t>errors.csv：</a:t>
+            </a:r>
+            <a:r>
+              <a:rPr lang="en-US" sz="1200" dirty="0" err="1">
+                <a:solidFill>
+                  <a:srgbClr val="5A5A5A"/>
+                </a:solidFill>
+                <a:latin typeface="Microsoft YaHei"/>
+              </a:rPr>
+              <a:t>PassengerId</a:t>
+            </a:r>
+            <a:r>
+              <a:rPr lang="en-US" sz="1200" dirty="0">
+                <a:solidFill>
+                  <a:srgbClr val="5A5A5A"/>
+                </a:solidFill>
+                <a:latin typeface="Microsoft YaHei"/>
+              </a:rPr>
+              <a:t>=12，</a:t>
+            </a:r>
+            <a:r>
+              <a:rPr lang="zh-CN" altLang="en-US" sz="1200" dirty="0">
+                <a:solidFill>
+                  <a:srgbClr val="5A5A5A"/>
+                </a:solidFill>
+                <a:latin typeface="Microsoft YaHei"/>
+              </a:rPr>
+              <a:t>乘客姓名：</a:t>
+            </a:r>
+            <a:r>
+              <a:rPr lang="en-US" sz="1200" dirty="0">
+                <a:solidFill>
+                  <a:srgbClr val="5A5A5A"/>
+                </a:solidFill>
+                <a:latin typeface="Microsoft YaHei"/>
+              </a:rPr>
+              <a:t>Bonnell, Miss. Elizabeth</a:t>
+            </a:r>
+            <a:endParaRPr sz="1200" dirty="0">
+              <a:solidFill>
+                <a:srgbClr val="5A5A5A"/>
+              </a:solidFill>
+              <a:latin typeface="Microsoft YaHei"/>
+            </a:endParaRPr>
           </a:p>
         </p:txBody>
       </p:sp>
@@ -3782,7 +3896,7 @@
         <p:spPr>
           <a:xfrm>
             <a:off x="685800" y="1133856"/>
-            <a:ext cx="5290794" cy="4042132"/>
+            <a:ext cx="5290794" cy="4329390"/>
           </a:xfrm>
           <a:prstGeom prst="rect">
             <a:avLst/>
@@ -3796,7 +3910,7 @@
           <a:lstStyle/>
           <a:p>
             <a:r>
-              <a:rPr sz="2400" b="1" dirty="0" err="1">
+              <a:rPr b="1" dirty="0" err="1">
                 <a:solidFill>
                   <a:srgbClr val="232323"/>
                 </a:solidFill>
@@ -3804,7 +3918,7 @@
               </a:rPr>
               <a:t>流程</a:t>
             </a:r>
-            <a:endParaRPr sz="2400" b="1" dirty="0">
+            <a:endParaRPr b="1" dirty="0">
               <a:solidFill>
                 <a:srgbClr val="232323"/>
               </a:solidFill>
@@ -3818,7 +3932,98 @@
               </a:spcAft>
             </a:pPr>
             <a:r>
-              <a:rPr dirty="0">
+              <a:rPr lang="zh-CN" altLang="en-US" sz="1400" dirty="0">
+                <a:solidFill>
+                  <a:srgbClr val="232323"/>
+                </a:solidFill>
+                <a:latin typeface="Microsoft YaHei"/>
+              </a:rPr>
+              <a:t>**原始记录片段（</a:t>
+            </a:r>
+            <a:r>
+              <a:rPr lang="en-US" sz="1400" dirty="0">
+                <a:solidFill>
+                  <a:srgbClr val="232323"/>
+                </a:solidFill>
+                <a:latin typeface="Microsoft YaHei"/>
+              </a:rPr>
+              <a:t>train.csv）**</a:t>
+            </a:r>
+          </a:p>
+          <a:p>
+            <a:pPr>
+              <a:spcAft>
+                <a:spcPts val="500"/>
+              </a:spcAft>
+            </a:pPr>
+            <a:r>
+              <a:rPr lang="en-US" sz="1400" dirty="0">
+                <a:solidFill>
+                  <a:srgbClr val="232323"/>
+                </a:solidFill>
+                <a:latin typeface="Microsoft YaHei"/>
+              </a:rPr>
+              <a:t>|</a:t>
+            </a:r>
+            <a:r>
+              <a:rPr lang="en-US" sz="1400" dirty="0" err="1">
+                <a:solidFill>
+                  <a:srgbClr val="232323"/>
+                </a:solidFill>
+                <a:latin typeface="Microsoft YaHei"/>
+              </a:rPr>
+              <a:t>PassengerId|Survived|Pclass|Sex|Age|SibSp|Parch|Fare|Embarked</a:t>
+            </a:r>
+            <a:r>
+              <a:rPr lang="en-US" sz="1400" dirty="0">
+                <a:solidFill>
+                  <a:srgbClr val="232323"/>
+                </a:solidFill>
+                <a:latin typeface="Microsoft YaHei"/>
+              </a:rPr>
+              <a:t>|</a:t>
+            </a:r>
+          </a:p>
+          <a:p>
+            <a:pPr>
+              <a:spcAft>
+                <a:spcPts val="500"/>
+              </a:spcAft>
+            </a:pPr>
+            <a:r>
+              <a:rPr lang="en-US" sz="1400" dirty="0">
+                <a:solidFill>
+                  <a:srgbClr val="232323"/>
+                </a:solidFill>
+                <a:latin typeface="Microsoft YaHei"/>
+              </a:rPr>
+              <a:t>|---|---|---|---|---|---|---|---|---|</a:t>
+            </a:r>
+          </a:p>
+          <a:p>
+            <a:pPr>
+              <a:spcAft>
+                <a:spcPts val="500"/>
+              </a:spcAft>
+            </a:pPr>
+            <a:r>
+              <a:rPr lang="en-US" sz="1400" dirty="0">
+                <a:solidFill>
+                  <a:srgbClr val="232323"/>
+                </a:solidFill>
+                <a:latin typeface="Microsoft YaHei"/>
+              </a:rPr>
+              <a:t>|12|1|1|female|58|0|0|26.55|S|</a:t>
+            </a:r>
+          </a:p>
+          <a:p>
+            <a:pPr>
+              <a:spcAft>
+                <a:spcPts val="500"/>
+              </a:spcAft>
+            </a:pPr>
+            <a:r>
+              <a:rPr sz="1400" dirty="0">
                 <a:solidFill>
                   <a:srgbClr val="232323"/>
                 </a:solidFill>
@@ -3827,7 +4032,7 @@
               <a:t>1) </a:t>
             </a:r>
             <a:r>
-              <a:rPr dirty="0" err="1">
+              <a:rPr sz="1400" dirty="0" err="1">
                 <a:solidFill>
                   <a:srgbClr val="232323"/>
                 </a:solidFill>
@@ -3836,7 +4041,7 @@
               <a:t>load_frame</a:t>
             </a:r>
             <a:r>
-              <a:rPr dirty="0">
+              <a:rPr sz="1400" dirty="0">
                 <a:solidFill>
                   <a:srgbClr val="232323"/>
                 </a:solidFill>
@@ -3845,7 +4050,7 @@
               <a:t>() </a:t>
             </a:r>
             <a:r>
-              <a:rPr dirty="0" err="1">
+              <a:rPr sz="1400" dirty="0" err="1">
                 <a:solidFill>
                   <a:srgbClr val="232323"/>
                 </a:solidFill>
@@ -3854,7 +4059,7 @@
               <a:t>读取</a:t>
             </a:r>
             <a:r>
-              <a:rPr dirty="0">
+              <a:rPr sz="1400" dirty="0">
                 <a:solidFill>
                   <a:srgbClr val="232323"/>
                 </a:solidFill>
@@ -3863,7 +4068,7 @@
               <a:t> data/raw/</a:t>
             </a:r>
             <a:r>
-              <a:rPr dirty="0" err="1">
+              <a:rPr sz="1400" dirty="0" err="1">
                 <a:solidFill>
                   <a:srgbClr val="232323"/>
                 </a:solidFill>
@@ -3872,7 +4077,7 @@
               <a:t>train.csv；verify_real_data</a:t>
             </a:r>
             <a:r>
-              <a:rPr dirty="0">
+              <a:rPr sz="1400" dirty="0">
                 <a:solidFill>
                   <a:srgbClr val="232323"/>
                 </a:solidFill>
@@ -3881,7 +4086,7 @@
               <a:t>() </a:t>
             </a:r>
             <a:r>
-              <a:rPr dirty="0" err="1">
+              <a:rPr sz="1400" dirty="0" err="1">
                 <a:solidFill>
                   <a:srgbClr val="232323"/>
                 </a:solidFill>
@@ -3890,7 +4095,7 @@
               <a:t>检查</a:t>
             </a:r>
             <a:r>
-              <a:rPr dirty="0">
+              <a:rPr sz="1400" dirty="0">
                 <a:solidFill>
                   <a:srgbClr val="232323"/>
                 </a:solidFill>
@@ -3899,7 +4104,7 @@
               <a:t> 891 行、12 </a:t>
             </a:r>
             <a:r>
-              <a:rPr dirty="0" err="1">
+              <a:rPr sz="1400" dirty="0" err="1">
                 <a:solidFill>
                   <a:srgbClr val="232323"/>
                 </a:solidFill>
@@ -3907,7 +4112,7 @@
               </a:rPr>
               <a:t>列和标签计数</a:t>
             </a:r>
-            <a:endParaRPr dirty="0">
+            <a:endParaRPr sz="1400" dirty="0">
               <a:solidFill>
                 <a:srgbClr val="232323"/>
               </a:solidFill>
@@ -3921,7 +4126,7 @@
               </a:spcAft>
             </a:pPr>
             <a:r>
-              <a:rPr dirty="0">
+              <a:rPr sz="1400" dirty="0">
                 <a:solidFill>
                   <a:srgbClr val="232323"/>
                 </a:solidFill>
@@ -3930,7 +4135,7 @@
               <a:t>2) </a:t>
             </a:r>
             <a:r>
-              <a:rPr dirty="0" err="1">
+              <a:rPr sz="1400" dirty="0" err="1">
                 <a:solidFill>
                   <a:srgbClr val="232323"/>
                 </a:solidFill>
@@ -3939,7 +4144,7 @@
               <a:t>make_xy</a:t>
             </a:r>
             <a:r>
-              <a:rPr dirty="0">
+              <a:rPr sz="1400" dirty="0">
                 <a:solidFill>
                   <a:srgbClr val="232323"/>
                 </a:solidFill>
@@ -3948,7 +4153,7 @@
               <a:t>() </a:t>
             </a:r>
             <a:r>
-              <a:rPr dirty="0" err="1">
+              <a:rPr sz="1400" dirty="0" err="1">
                 <a:solidFill>
                   <a:srgbClr val="232323"/>
                 </a:solidFill>
@@ -3957,7 +4162,7 @@
               <a:t>取出特征列</a:t>
             </a:r>
             <a:r>
-              <a:rPr dirty="0">
+              <a:rPr sz="1400" dirty="0">
                 <a:solidFill>
                   <a:srgbClr val="232323"/>
                 </a:solidFill>
@@ -3966,7 +4171,7 @@
               <a:t> </a:t>
             </a:r>
             <a:r>
-              <a:rPr dirty="0" err="1">
+              <a:rPr sz="1400" dirty="0" err="1">
                 <a:solidFill>
                   <a:srgbClr val="232323"/>
                 </a:solidFill>
@@ -3975,7 +4180,7 @@
               <a:t>Pclass</a:t>
             </a:r>
             <a:r>
-              <a:rPr dirty="0">
+              <a:rPr sz="1400" dirty="0">
                 <a:solidFill>
                   <a:srgbClr val="232323"/>
                 </a:solidFill>
@@ -3984,7 +4189,7 @@
               <a:t>, Sex, Age, </a:t>
             </a:r>
             <a:r>
-              <a:rPr dirty="0" err="1">
+              <a:rPr sz="1400" dirty="0" err="1">
                 <a:solidFill>
                   <a:srgbClr val="232323"/>
                 </a:solidFill>
@@ -3993,7 +4198,7 @@
               <a:t>SibSp</a:t>
             </a:r>
             <a:r>
-              <a:rPr dirty="0">
+              <a:rPr sz="1400" dirty="0">
                 <a:solidFill>
                   <a:srgbClr val="232323"/>
                 </a:solidFill>
@@ -4002,7 +4207,7 @@
               <a:t>, Parch, Fare, Embarked </a:t>
             </a:r>
             <a:r>
-              <a:rPr dirty="0" err="1">
+              <a:rPr sz="1400" dirty="0" err="1">
                 <a:solidFill>
                   <a:srgbClr val="232323"/>
                 </a:solidFill>
@@ -4011,7 +4216,7 @@
               <a:t>和标签</a:t>
             </a:r>
             <a:r>
-              <a:rPr dirty="0">
+              <a:rPr sz="1400" dirty="0">
                 <a:solidFill>
                   <a:srgbClr val="232323"/>
                 </a:solidFill>
@@ -4027,7 +4232,7 @@
               </a:spcAft>
             </a:pPr>
             <a:r>
-              <a:rPr dirty="0">
+              <a:rPr sz="1400" dirty="0">
                 <a:solidFill>
                   <a:srgbClr val="232323"/>
                 </a:solidFill>
@@ -4036,7 +4241,7 @@
               <a:t>3) </a:t>
             </a:r>
             <a:r>
-              <a:rPr dirty="0" err="1">
+              <a:rPr sz="1400" dirty="0" err="1">
                 <a:solidFill>
                   <a:srgbClr val="232323"/>
                 </a:solidFill>
@@ -4045,7 +4250,7 @@
               <a:t>make_split</a:t>
             </a:r>
             <a:r>
-              <a:rPr dirty="0">
+              <a:rPr sz="1400" dirty="0">
                 <a:solidFill>
                   <a:srgbClr val="232323"/>
                 </a:solidFill>
@@ -4054,7 +4259,7 @@
               <a:t>() 用 </a:t>
             </a:r>
             <a:r>
-              <a:rPr dirty="0" err="1">
+              <a:rPr sz="1400" dirty="0" err="1">
                 <a:solidFill>
                   <a:srgbClr val="232323"/>
                 </a:solidFill>
@@ -4063,7 +4268,7 @@
               <a:t>random_state</a:t>
             </a:r>
             <a:r>
-              <a:rPr dirty="0">
+              <a:rPr sz="1400" dirty="0">
                 <a:solidFill>
                   <a:srgbClr val="232323"/>
                 </a:solidFill>
@@ -4072,7 +4277,7 @@
               <a:t>=42 </a:t>
             </a:r>
             <a:r>
-              <a:rPr dirty="0" err="1">
+              <a:rPr sz="1400" dirty="0" err="1">
                 <a:solidFill>
                   <a:srgbClr val="232323"/>
                 </a:solidFill>
@@ -4080,7 +4285,7 @@
               </a:rPr>
               <a:t>分层划分，样本进入训练集或测试集</a:t>
             </a:r>
-            <a:endParaRPr dirty="0">
+            <a:endParaRPr sz="1400" dirty="0">
               <a:solidFill>
                 <a:srgbClr val="232323"/>
               </a:solidFill>
@@ -4094,7 +4299,7 @@
               </a:spcAft>
             </a:pPr>
             <a:r>
-              <a:rPr dirty="0">
+              <a:rPr sz="1400" dirty="0">
                 <a:solidFill>
                   <a:srgbClr val="232323"/>
                 </a:solidFill>
@@ -4103,7 +4308,7 @@
               <a:t>4) preprocessor()：</a:t>
             </a:r>
             <a:r>
-              <a:rPr dirty="0" err="1">
+              <a:rPr sz="1400" dirty="0" err="1">
                 <a:solidFill>
                   <a:srgbClr val="232323"/>
                 </a:solidFill>
@@ -4112,7 +4317,7 @@
               <a:t>数值列用中位数补缺失；类别列用众数补缺失并做</a:t>
             </a:r>
             <a:r>
-              <a:rPr dirty="0">
+              <a:rPr sz="1400" dirty="0">
                 <a:solidFill>
                   <a:srgbClr val="232323"/>
                 </a:solidFill>
@@ -4128,7 +4333,7 @@
               </a:spcAft>
             </a:pPr>
             <a:r>
-              <a:rPr dirty="0">
+              <a:rPr sz="1400" dirty="0">
                 <a:solidFill>
                   <a:srgbClr val="232323"/>
                 </a:solidFill>
@@ -4137,7 +4342,7 @@
               <a:t>5) </a:t>
             </a:r>
             <a:r>
-              <a:rPr dirty="0" err="1">
+              <a:rPr sz="1400" dirty="0" err="1">
                 <a:solidFill>
                   <a:srgbClr val="232323"/>
                 </a:solidFill>
@@ -4146,7 +4351,7 @@
               <a:t>build_baseline</a:t>
             </a:r>
             <a:r>
-              <a:rPr dirty="0">
+              <a:rPr sz="1400" dirty="0">
                 <a:solidFill>
                   <a:srgbClr val="232323"/>
                 </a:solidFill>
@@ -4155,7 +4360,7 @@
               <a:t>() 的 </a:t>
             </a:r>
             <a:r>
-              <a:rPr dirty="0" err="1">
+              <a:rPr sz="1400" dirty="0" err="1">
                 <a:solidFill>
                   <a:srgbClr val="232323"/>
                 </a:solidFill>
@@ -4164,7 +4369,7 @@
               <a:t>DummyClassifier</a:t>
             </a:r>
             <a:r>
-              <a:rPr dirty="0">
+              <a:rPr sz="1400" dirty="0">
                 <a:solidFill>
                   <a:srgbClr val="232323"/>
                 </a:solidFill>
@@ -4173,7 +4378,7 @@
               <a:t> </a:t>
             </a:r>
             <a:r>
-              <a:rPr dirty="0" err="1">
+              <a:rPr sz="1400" dirty="0" err="1">
                 <a:solidFill>
                   <a:srgbClr val="232323"/>
                 </a:solidFill>
@@ -4182,7 +4387,7 @@
               <a:t>永远猜多数类；build_candidate</a:t>
             </a:r>
             <a:r>
-              <a:rPr dirty="0">
+              <a:rPr sz="1400" dirty="0">
                 <a:solidFill>
                   <a:srgbClr val="232323"/>
                 </a:solidFill>
@@ -4191,7 +4396,7 @@
               <a:t>() 的 </a:t>
             </a:r>
             <a:r>
-              <a:rPr dirty="0" err="1">
+              <a:rPr sz="1400" dirty="0" err="1">
                 <a:solidFill>
                   <a:srgbClr val="232323"/>
                 </a:solidFill>
@@ -4200,7 +4405,7 @@
               <a:t>RandomForestClassifier</a:t>
             </a:r>
             <a:r>
-              <a:rPr dirty="0">
+              <a:rPr sz="1400" dirty="0">
                 <a:solidFill>
                   <a:srgbClr val="232323"/>
                 </a:solidFill>
@@ -4209,7 +4414,7 @@
               <a:t> </a:t>
             </a:r>
             <a:r>
-              <a:rPr dirty="0" err="1">
+              <a:rPr sz="1400" dirty="0" err="1">
                 <a:solidFill>
                   <a:srgbClr val="232323"/>
                 </a:solidFill>
@@ -4218,7 +4423,7 @@
               <a:t>用训练集学习后再</a:t>
             </a:r>
             <a:r>
-              <a:rPr dirty="0">
+              <a:rPr sz="1400" dirty="0">
                 <a:solidFill>
                   <a:srgbClr val="232323"/>
                 </a:solidFill>
@@ -4328,7 +4533,7 @@
         <p:spPr>
           <a:xfrm>
             <a:off x="6537960" y="1133856"/>
-            <a:ext cx="4937760" cy="1697901"/>
+            <a:ext cx="4937760" cy="1079783"/>
           </a:xfrm>
           <a:prstGeom prst="rect">
             <a:avLst/>
@@ -4364,13 +4569,22 @@
               </a:spcAft>
             </a:pPr>
             <a:r>
+              <a:rPr dirty="0" err="1">
+                <a:solidFill>
+                  <a:srgbClr val="232323"/>
+                </a:solidFill>
+                <a:latin typeface="Microsoft YaHei"/>
+              </a:rPr>
+              <a:t>真实值</a:t>
+            </a:r>
+            <a:r>
               <a:rPr dirty="0">
                 <a:solidFill>
                   <a:srgbClr val="232323"/>
                 </a:solidFill>
                 <a:latin typeface="Microsoft YaHei"/>
               </a:rPr>
-              <a:t>errors.csv </a:t>
+              <a:t> </a:t>
             </a:r>
             <a:r>
               <a:rPr dirty="0" err="1">
@@ -4379,7 +4593,7 @@
                 </a:solidFill>
                 <a:latin typeface="Microsoft YaHei"/>
               </a:rPr>
-              <a:t>记录到：source_row</a:t>
+              <a:t>true_survived</a:t>
             </a:r>
             <a:r>
               <a:rPr dirty="0">
@@ -4388,69 +4602,23 @@
                 </a:solidFill>
                 <a:latin typeface="Microsoft YaHei"/>
               </a:rPr>
-              <a:t> 501 / </a:t>
-            </a:r>
-            <a:r>
-              <a:rPr dirty="0" err="1">
-                <a:solidFill>
-                  <a:srgbClr val="232323"/>
-                </a:solidFill>
-                <a:latin typeface="Microsoft YaHei"/>
-              </a:rPr>
-              <a:t>PassengerId</a:t>
-            </a:r>
-            <a:r>
-              <a:rPr dirty="0">
-                <a:solidFill>
-                  <a:srgbClr val="232323"/>
-                </a:solidFill>
-                <a:latin typeface="Microsoft YaHei"/>
-              </a:rPr>
-              <a:t> 502</a:t>
-            </a:r>
-          </a:p>
-          <a:p>
-            <a:pPr>
-              <a:spcAft>
-                <a:spcPts val="500"/>
-              </a:spcAft>
-            </a:pPr>
-            <a:r>
-              <a:rPr dirty="0" err="1">
-                <a:solidFill>
-                  <a:srgbClr val="232323"/>
-                </a:solidFill>
-                <a:latin typeface="Microsoft YaHei"/>
-              </a:rPr>
-              <a:t>真实值</a:t>
-            </a:r>
-            <a:r>
-              <a:rPr dirty="0">
-                <a:solidFill>
-                  <a:srgbClr val="232323"/>
-                </a:solidFill>
-                <a:latin typeface="Microsoft YaHei"/>
-              </a:rPr>
-              <a:t> </a:t>
-            </a:r>
-            <a:r>
-              <a:rPr dirty="0" err="1">
-                <a:solidFill>
-                  <a:srgbClr val="232323"/>
-                </a:solidFill>
-                <a:latin typeface="Microsoft YaHei"/>
-              </a:rPr>
-              <a:t>true_survived</a:t>
-            </a:r>
-            <a:r>
-              <a:rPr dirty="0">
-                <a:solidFill>
-                  <a:srgbClr val="232323"/>
-                </a:solidFill>
-                <a:latin typeface="Microsoft YaHei"/>
-              </a:rPr>
-              <a:t> = 0</a:t>
-            </a:r>
+              <a:t> = </a:t>
+            </a:r>
+            <a:r>
+              <a:rPr lang="en-US" dirty="0">
+                <a:solidFill>
+                  <a:srgbClr val="232323"/>
+                </a:solidFill>
+                <a:latin typeface="Microsoft YaHei"/>
+              </a:rPr>
+              <a:t>1</a:t>
+            </a:r>
+            <a:endParaRPr dirty="0">
+              <a:solidFill>
+                <a:srgbClr val="232323"/>
+              </a:solidFill>
+              <a:latin typeface="Microsoft YaHei"/>
+            </a:endParaRPr>
           </a:p>
           <a:p>
             <a:pPr>
@@ -6757,7 +6925,7 @@
         <p:spPr>
           <a:xfrm>
             <a:off x="548640" y="3429000"/>
-            <a:ext cx="11064240" cy="1691640"/>
+            <a:ext cx="11064240" cy="2642616"/>
           </a:xfrm>
           <a:prstGeom prst="roundRect">
             <a:avLst/>
@@ -6847,7 +7015,7 @@
         <p:spPr>
           <a:xfrm>
             <a:off x="731520" y="3575304"/>
-            <a:ext cx="10744200" cy="1508760"/>
+            <a:ext cx="7568097" cy="2013372"/>
           </a:xfrm>
           <a:prstGeom prst="rect">
             <a:avLst/>
@@ -6891,7 +7059,7 @@
               </a:rPr>
               <a:t>继续打开更多错分样本，看看错误是否集中在某些特征组合上</a:t>
             </a:r>
-            <a:endParaRPr sz="1400" dirty="0">
+            <a:endParaRPr lang="en-US" sz="1400" dirty="0">
               <a:solidFill>
                 <a:srgbClr val="232323"/>
               </a:solidFill>
@@ -6905,38 +7073,55 @@
               </a:spcAft>
             </a:pPr>
             <a:r>
-              <a:rPr sz="1400" dirty="0" err="1">
-                <a:solidFill>
-                  <a:srgbClr val="232323"/>
-                </a:solidFill>
-                <a:latin typeface="Microsoft YaHei"/>
-              </a:rPr>
-              <a:t>然后把结论写回</a:t>
-            </a:r>
-            <a:r>
-              <a:rPr sz="1400" dirty="0">
-                <a:solidFill>
-                  <a:srgbClr val="232323"/>
-                </a:solidFill>
-                <a:latin typeface="Microsoft YaHei"/>
-              </a:rPr>
-              <a:t> report.md 和 </a:t>
-            </a:r>
-            <a:r>
-              <a:rPr sz="1400" dirty="0" err="1">
-                <a:solidFill>
-                  <a:srgbClr val="232323"/>
-                </a:solidFill>
-                <a:latin typeface="Microsoft YaHei"/>
-              </a:rPr>
-              <a:t>PPT，保证报告、PPT、代码一致</a:t>
-            </a:r>
-            <a:endParaRPr sz="1400" dirty="0">
-              <a:solidFill>
-                <a:srgbClr val="232323"/>
-              </a:solidFill>
-              <a:latin typeface="Microsoft YaHei"/>
-            </a:endParaRPr>
+              <a:rPr lang="zh-CN" altLang="en-US" sz="1400" dirty="0">
+                <a:solidFill>
+                  <a:srgbClr val="232323"/>
+                </a:solidFill>
+                <a:latin typeface="黑体" panose="02010609060101010101" pitchFamily="49" charset="-122"/>
+                <a:ea typeface="黑体" panose="02010609060101010101" pitchFamily="49" charset="-122"/>
+              </a:rPr>
+              <a:t>检查错分样本缺失值：错误是不是大多发生在</a:t>
+            </a:r>
+            <a:r>
+              <a:rPr lang="en-US" altLang="zh-CN" sz="1400" dirty="0">
+                <a:solidFill>
+                  <a:srgbClr val="232323"/>
+                </a:solidFill>
+                <a:latin typeface="黑体" panose="02010609060101010101" pitchFamily="49" charset="-122"/>
+                <a:ea typeface="黑体" panose="02010609060101010101" pitchFamily="49" charset="-122"/>
+              </a:rPr>
+              <a:t>Age</a:t>
+            </a:r>
+            <a:r>
+              <a:rPr lang="zh-CN" altLang="en-US" sz="1400" dirty="0">
+                <a:solidFill>
+                  <a:srgbClr val="232323"/>
+                </a:solidFill>
+                <a:latin typeface="黑体" panose="02010609060101010101" pitchFamily="49" charset="-122"/>
+                <a:ea typeface="黑体" panose="02010609060101010101" pitchFamily="49" charset="-122"/>
+              </a:rPr>
+              <a:t>缺失、</a:t>
+            </a:r>
+            <a:r>
+              <a:rPr lang="en-US" altLang="zh-CN" sz="1400" dirty="0">
+                <a:solidFill>
+                  <a:srgbClr val="232323"/>
+                </a:solidFill>
+                <a:latin typeface="黑体" panose="02010609060101010101" pitchFamily="49" charset="-122"/>
+                <a:ea typeface="黑体" panose="02010609060101010101" pitchFamily="49" charset="-122"/>
+              </a:rPr>
+              <a:t>Embarked</a:t>
+            </a:r>
+            <a:r>
+              <a:rPr lang="zh-CN" altLang="en-US" sz="1400" dirty="0">
+                <a:solidFill>
+                  <a:srgbClr val="232323"/>
+                </a:solidFill>
+                <a:latin typeface="黑体" panose="02010609060101010101" pitchFamily="49" charset="-122"/>
+                <a:ea typeface="黑体" panose="02010609060101010101" pitchFamily="49" charset="-122"/>
+              </a:rPr>
+              <a:t>缺失的样本；</a:t>
+            </a:r>
           </a:p>
           <a:p>
             <a:pPr>
@@ -6945,13 +7130,109 @@
               </a:spcAft>
             </a:pPr>
             <a:r>
+              <a:rPr lang="zh-CN" altLang="en-US" sz="1400" dirty="0">
+                <a:solidFill>
+                  <a:srgbClr val="232323"/>
+                </a:solidFill>
+                <a:latin typeface="黑体" panose="02010609060101010101" pitchFamily="49" charset="-122"/>
+                <a:ea typeface="黑体" panose="02010609060101010101" pitchFamily="49" charset="-122"/>
+              </a:rPr>
+              <a:t>查看训练数据：</a:t>
+            </a:r>
+            <a:r>
+              <a:rPr lang="en-US" altLang="zh-CN" sz="1400" dirty="0">
+                <a:solidFill>
+                  <a:srgbClr val="232323"/>
+                </a:solidFill>
+                <a:latin typeface="黑体" panose="02010609060101010101" pitchFamily="49" charset="-122"/>
+                <a:ea typeface="黑体" panose="02010609060101010101" pitchFamily="49" charset="-122"/>
+              </a:rPr>
+              <a:t>3</a:t>
+            </a:r>
+            <a:r>
+              <a:rPr lang="zh-CN" altLang="en-US" sz="1400" dirty="0">
+                <a:solidFill>
+                  <a:srgbClr val="232323"/>
+                </a:solidFill>
+                <a:latin typeface="黑体" panose="02010609060101010101" pitchFamily="49" charset="-122"/>
+                <a:ea typeface="黑体" panose="02010609060101010101" pitchFamily="49" charset="-122"/>
+              </a:rPr>
+              <a:t>等舱女性样本在训练集数量是否偏少，模型学习不足；</a:t>
+            </a:r>
+          </a:p>
+          <a:p>
+            <a:pPr>
+              <a:spcAft>
+                <a:spcPts val="500"/>
+              </a:spcAft>
+            </a:pPr>
+            <a:r>
+              <a:rPr lang="zh-CN" altLang="en-US" sz="1400" dirty="0">
+                <a:solidFill>
+                  <a:srgbClr val="232323"/>
+                </a:solidFill>
+                <a:latin typeface="黑体" panose="02010609060101010101" pitchFamily="49" charset="-122"/>
+                <a:ea typeface="黑体" panose="02010609060101010101" pitchFamily="49" charset="-122"/>
+              </a:rPr>
+              <a:t>后续动作：可以尝试增加特征、调优随机森林超参数，或者检查预处理流程是否存在问题。</a:t>
+            </a:r>
+          </a:p>
+          <a:p>
+            <a:pPr>
+              <a:spcAft>
+                <a:spcPts val="500"/>
+              </a:spcAft>
+            </a:pPr>
+            <a:r>
+              <a:rPr lang="zh-CN" altLang="en-US" sz="1600" dirty="0">
+                <a:solidFill>
+                  <a:srgbClr val="232323"/>
+                </a:solidFill>
+                <a:latin typeface="黑体" panose="02010609060101010101" pitchFamily="49" charset="-122"/>
+                <a:ea typeface="黑体" panose="02010609060101010101" pitchFamily="49" charset="-122"/>
+              </a:rPr>
+              <a:t>不能只看总体指标，要看模型究竟在哪一类样本上面持续犯错。</a:t>
+            </a:r>
+            <a:endParaRPr sz="1600" dirty="0">
+              <a:solidFill>
+                <a:srgbClr val="232323"/>
+              </a:solidFill>
+              <a:latin typeface="黑体" panose="02010609060101010101" pitchFamily="49" charset="-122"/>
+              <a:ea typeface="黑体" panose="02010609060101010101" pitchFamily="49" charset="-122"/>
+            </a:endParaRPr>
+          </a:p>
+          <a:p>
+            <a:pPr>
+              <a:spcAft>
+                <a:spcPts val="500"/>
+              </a:spcAft>
+            </a:pPr>
+            <a:r>
               <a:rPr sz="1400" dirty="0" err="1">
                 <a:solidFill>
                   <a:srgbClr val="232323"/>
                 </a:solidFill>
                 <a:latin typeface="Microsoft YaHei"/>
               </a:rPr>
-              <a:t>答辩时要能说清楚：智能体建议了什么，学生自己怎样核对</a:t>
+              <a:t>然后把结论写回</a:t>
+            </a:r>
+            <a:r>
+              <a:rPr sz="1400" dirty="0">
+                <a:solidFill>
+                  <a:srgbClr val="232323"/>
+                </a:solidFill>
+                <a:latin typeface="Microsoft YaHei"/>
+              </a:rPr>
+              <a:t> report.md 和 </a:t>
+            </a:r>
+            <a:r>
+              <a:rPr sz="1400" dirty="0" err="1">
+                <a:solidFill>
+                  <a:srgbClr val="232323"/>
+                </a:solidFill>
+                <a:latin typeface="Microsoft YaHei"/>
+              </a:rPr>
+              <a:t>PPT，保证报告、PPT、代码一致</a:t>
             </a:r>
             <a:endParaRPr sz="1400" dirty="0">
               <a:solidFill>
